--- a/presentations/Guerrero_SlideDeck.pptx
+++ b/presentations/Guerrero_SlideDeck.pptx
@@ -2434,7 +2434,7 @@
           <a:p>
             <a:fld id="{A4C477E3-25FD-4247-A204-0F8A6AAEAD59}" type="datetimeFigureOut">
               <a:rPr lang="en-US" smtClean="0"/>
-              <a:t>5/28/2026</a:t>
+              <a:t>5/29/2026</a:t>
             </a:fld>
             <a:endParaRPr lang="en-US"/>
           </a:p>
@@ -14099,10 +14099,7 @@
             <a:avLst/>
           </a:prstGeom>
           <a:solidFill>
-            <a:schemeClr val="tx2">
-              <a:lumMod val="60000"/>
-              <a:lumOff val="40000"/>
-            </a:schemeClr>
+            <a:schemeClr val="bg1"/>
           </a:solidFill>
           <a:ln/>
           <a:effectLst>
@@ -14277,6 +14274,42 @@
           </a:fontRef>
         </p:style>
       </p:cxnSp>
+      <p:pic>
+        <p:nvPicPr>
+          <p:cNvPr id="3" name="Picture 2" descr="Capstone 2: EmporiUm Sales Territory Analysis with Python&#10;&#10;AI-generated content may be incorrect.">
+            <a:extLst>
+              <a:ext uri="{FF2B5EF4-FFF2-40B4-BE49-F238E27FC236}">
+                <a16:creationId xmlns:a16="http://schemas.microsoft.com/office/drawing/2014/main" id="{C4F7DA21-D9A6-B586-1BC9-BCC197122EEE}"/>
+              </a:ext>
+            </a:extLst>
+          </p:cNvPr>
+          <p:cNvPicPr>
+            <a:picLocks noChangeAspect="1"/>
+          </p:cNvPicPr>
+          <p:nvPr/>
+        </p:nvPicPr>
+        <p:blipFill>
+          <a:blip r:embed="rId5">
+            <a:extLst>
+              <a:ext uri="{28A0092B-C50C-407E-A947-70E740481C1C}">
+                <a14:useLocalDpi xmlns:a14="http://schemas.microsoft.com/office/drawing/2010/main" val="0"/>
+              </a:ext>
+            </a:extLst>
+          </a:blip>
+          <a:stretch>
+            <a:fillRect/>
+          </a:stretch>
+        </p:blipFill>
+        <p:spPr>
+          <a:xfrm>
+            <a:off x="6383238" y="1358537"/>
+            <a:ext cx="5278410" cy="4761412"/>
+          </a:xfrm>
+          <a:prstGeom prst="rect">
+            <a:avLst/>
+          </a:prstGeom>
+        </p:spPr>
+      </p:pic>
     </p:spTree>
     <p:extLst>
       <p:ext uri="{BB962C8B-B14F-4D97-AF65-F5344CB8AC3E}">
